--- a/docs/HHGoa_2026_Presentation.pptx
+++ b/docs/HHGoa_2026_Presentation.pptx
@@ -2722,7 +2722,7 @@
                 <a:latin typeface="Tahoma"/>
                 <a:cs typeface="Tahoma"/>
               </a:rPr>
-              <a:t xml:space="preserve">Problem Statement Theme : Graph-grounded fraud investigation</a:t>
+              <a:t xml:space="preserve">Problem Statement Theme : Investigating fraud alerts by hand</a:t>
             </a:r>
           </a:p>
           <a:p>
@@ -2742,7 +2742,7 @@
                 <a:latin typeface="Tahoma"/>
                 <a:cs typeface="Tahoma"/>
               </a:rPr>
-              <a:t xml:space="preserve">Problem Statement Title : GRAVEX // Fraud Intelligence</a:t>
+              <a:t xml:space="preserve">Problem Statement Title : GRAVEX, a graph investigation agent</a:t>
             </a:r>
           </a:p>
           <a:p>
@@ -3699,6 +3699,10 @@
           </p:nvPr>
         </p:nvSpPr>
         <p:spPr>
+          <a:xfrm>
+            <a:off x="1577340" y="3003667"/>
+            <a:ext cx="10802620" cy="3427729"/>
+          </a:xfrm>
           <a:prstGeom prst="rect"/>
         </p:spPr>
         <p:txBody>
@@ -3719,7 +3723,7 @@
               <a:rPr dirty="0" spc="75" sz="3200">
                 <a:latin typeface="Tahoma"/>
               </a:rPr>
-              <a:t xml:space="preserve">GRAVEX investigates a case over TigerGraph, records its evidence, and answers all 20 benchmark cases.</a:t>
+              <a:t xml:space="preserve">It reads the alert, walks the graph around the flagged transaction and gathers the evidence itself.</a:t>
             </a:r>
           </a:p>
           <a:p>
@@ -3735,7 +3739,7 @@
               <a:rPr dirty="0" spc="75" sz="3200">
                 <a:latin typeface="Tahoma"/>
               </a:rPr>
-              <a:t xml:space="preserve">The LLM never invents a relationship - it can only interpret what the graph returned.</a:t>
+              <a:t xml:space="preserve">The model never invents a link - if the graph does not have it, the agent does not have it.</a:t>
             </a:r>
           </a:p>
           <a:p>
@@ -3751,7 +3755,7 @@
               <a:rPr dirty="0" spc="75" sz="3200">
                 <a:latin typeface="Tahoma"/>
               </a:rPr>
-              <a:t xml:space="preserve">When evidence runs thin the system says so instead of guessing, then asks for what it needs.</a:t>
+              <a:t xml:space="preserve">When the evidence is thin it says so and asks for more, instead of forcing a verdict.</a:t>
             </a:r>
           </a:p>
         </p:txBody>
@@ -4714,7 +4718,7 @@
                 <a:latin typeface="Tahoma"/>
                 <a:cs typeface="Tahoma"/>
               </a:rPr>
-              <a:t xml:space="preserve">Stack: Next.js + FastAPI + LangGraph + Gemma 4 26B + TigerGraph 4.2.5 GSQL + scikit-learn RandomForest + SHAP + BGE-small-en-v1.5 GraphRAG.</a:t>
+              <a:t xml:space="preserve">Next.js console, FastAPI backend, LangGraph driving Gemma 4, TigerGraph holding the graph, scikit-learn and SHAP for scoring.</a:t>
             </a:r>
           </a:p>
           <a:p>
@@ -4734,7 +4738,7 @@
                 <a:latin typeface="Tahoma"/>
                 <a:cs typeface="Tahoma"/>
               </a:rPr>
-              <a:t xml:space="preserve">Method: 8 vertex / 11 edge schema, 2,505,266 edges, then a 12-node LangGraph machine: triage, investigate, evidence, XAI, policy, recommend.</a:t>
+              <a:t xml:space="preserve">The data loads into 8 vertex and 11 edge types - 2,505,266 edges - and one agent run goes from triage through to the recommendation.</a:t>
             </a:r>
           </a:p>
         </p:txBody>
@@ -5693,6 +5697,10 @@
           </p:nvPr>
         </p:nvSpPr>
         <p:spPr>
+          <a:xfrm>
+            <a:off x="886759" y="3003667"/>
+            <a:ext cx="10802620" cy="3427729"/>
+          </a:xfrm>
           <a:prstGeom prst="rect"/>
         </p:spPr>
         <p:txBody>
@@ -5713,7 +5721,7 @@
               <a:rPr dirty="0" spc="70" sz="3200">
                 <a:latin typeface="Tahoma"/>
               </a:rPr>
-              <a:t xml:space="preserve">Feasible today: all 14 architecture layers are LIVE against real artifacts, not design documents.</a:t>
+              <a:t xml:space="preserve">Everything runs today; a layer is only marked live when a real artifact stands behind it.</a:t>
             </a:r>
           </a:p>
           <a:p>
@@ -5729,7 +5737,7 @@
               <a:rPr dirty="0" spc="70" sz="3200">
                 <a:latin typeface="Tahoma"/>
               </a:rPr>
-              <a:t xml:space="preserve">Risk: graph scale and LLM cost, bounded by a one-round evidence loop and a read-only tool layer.</a:t>
+              <a:t xml:space="preserve">The risky parts are graph scale and model cost, and both are already built and measured.</a:t>
             </a:r>
           </a:p>
           <a:p>
@@ -5745,7 +5753,7 @@
               <a:rPr dirty="0" spc="70" sz="3200">
                 <a:latin typeface="Tahoma"/>
               </a:rPr>
-              <a:t xml:space="preserve">Mitigation: five dangerous operations refused by policy and graph writes blocked by design.</a:t>
+              <a:t xml:space="preserve">A read-only tool layer and a policy gate keep the agent from changing anything.</a:t>
             </a:r>
           </a:p>
         </p:txBody>
@@ -6708,7 +6716,7 @@
                 <a:latin typeface="Tahoma"/>
                 <a:cs typeface="Tahoma"/>
               </a:rPr>
-              <a:t xml:space="preserve">Analysts get a decision plus its evidence chain, not a black-box score - every claim traces to an artifact.</a:t>
+              <a:t xml:space="preserve">The analyst gets the reasoning behind a call, not just a score they are expected to trust.</a:t>
             </a:r>
           </a:p>
           <a:p>
@@ -6728,7 +6736,7 @@
                 <a:latin typeface="Tahoma"/>
                 <a:cs typeface="Tahoma"/>
               </a:rPr>
-              <a:t xml:space="preserve">Banks cut review time and false blocks: policy gates every action on an auto / L1 / L2 approval route.</a:t>
+              <a:t xml:space="preserve">Every action is gated by policy, so the agent recommends and a person still approves the heavy ones.</a:t>
             </a:r>
           </a:p>
         </p:txBody>
@@ -7563,6 +7571,10 @@
           </p:nvPr>
         </p:nvSpPr>
         <p:spPr>
+          <a:xfrm>
+            <a:off x="4933265" y="440997"/>
+            <a:ext cx="9144000" cy="695960"/>
+          </a:xfrm>
           <a:prstGeom prst="rect"/>
         </p:spPr>
         <p:txBody>
@@ -7619,7 +7631,7 @@
         <p:spPr>
           <a:xfrm>
             <a:off x="886759" y="3003667"/>
-            <a:ext cx="9055100" cy="3840480"/>
+            <a:ext cx="9055100" cy="5486400"/>
           </a:xfrm>
           <a:prstGeom prst="rect">
             <a:avLst/>
@@ -7640,14 +7652,14 @@
               </a:spcBef>
             </a:pPr>
             <a:r>
-              <a:rPr dirty="0" sz="3000" spc="55">
+              <a:rPr dirty="0" sz="3200" spc="55">
                 <a:solidFill>
                   <a:srgbClr val="FFFFFF"/>
                 </a:solidFill>
                 <a:latin typeface="Tahoma"/>
                 <a:cs typeface="Tahoma"/>
               </a:rPr>
-              <a:t xml:space="preserve">IEEE-CIS Fraud Detection dataset - Vesta Corporation, via the IEEE Computational Intelligence Society</a:t>
+              <a:t xml:space="preserve">IEEE-CIS Fraud Detection dataset, Vesta Corporation, via the IEEE Computational Intelligence Society</a:t>
             </a:r>
           </a:p>
           <a:p>
@@ -7660,7 +7672,7 @@
               </a:spcBef>
             </a:pPr>
             <a:r>
-              <a:rPr dirty="0" sz="3000" spc="55">
+              <a:rPr dirty="0" sz="3200" spc="55">
                 <a:solidFill>
                   <a:srgbClr val="FFFFFF"/>
                 </a:solidFill>
@@ -7680,7 +7692,7 @@
               </a:spcBef>
             </a:pPr>
             <a:r>
-              <a:rPr dirty="0" sz="3000" spc="55">
+              <a:rPr dirty="0" sz="3200" spc="55">
                 <a:solidFill>
                   <a:srgbClr val="FFFFFF"/>
                 </a:solidFill>
@@ -7700,14 +7712,14 @@
               </a:spcBef>
             </a:pPr>
             <a:r>
-              <a:rPr dirty="0" sz="3000" spc="55">
+              <a:rPr dirty="0" sz="3200" spc="55">
                 <a:solidFill>
                   <a:srgbClr val="FFFFFF"/>
                 </a:solidFill>
                 <a:latin typeface="Tahoma"/>
                 <a:cs typeface="Tahoma"/>
               </a:rPr>
-              <a:t xml:space="preserve">TigerGraph 4.2.5 GSQL, LangGraph, Gemma, scikit-learn / SHAP, Next.js, FastAPI</a:t>
+              <a:t xml:space="preserve">TigerGraph 4.2.5 GSQL, LangGraph, Gemma, scikit-learn and SHAP, Next.js, FastAPI</a:t>
             </a:r>
           </a:p>
         </p:txBody>
@@ -8659,6 +8671,10 @@
           </p:nvPr>
         </p:nvSpPr>
         <p:spPr>
+          <a:xfrm>
+            <a:off x="886759" y="3003667"/>
+            <a:ext cx="10802620" cy="3427729"/>
+          </a:xfrm>
           <a:prstGeom prst="rect"/>
         </p:spPr>
         <p:txBody>
@@ -8679,7 +8695,7 @@
               <a:rPr dirty="0" spc="70" sz="3200">
                 <a:latin typeface="Tahoma"/>
               </a:rPr>
-              <a:t xml:space="preserve">20/20 case files PASS, 0 errors, 210 evidence items, 6 fraud, 3 legitimate, 11 uncertain, 6 SAR filed.</a:t>
+              <a:t xml:space="preserve">All 20 case files pass validation, with 210 evidence items behind them.</a:t>
             </a:r>
           </a:p>
           <a:p>
@@ -8695,7 +8711,7 @@
               <a:rPr dirty="0" spc="70" sz="3200">
                 <a:latin typeface="Tahoma"/>
               </a:rPr>
-              <a:t xml:space="preserve">Agent run: 114 real tool calls, all COMPLETE, verdict match 20/20, probability match 20/20.</a:t>
+              <a:t xml:space="preserve">Across the 20 runs the agent made 114 real tool calls and matched the expected verdict every time.</a:t>
             </a:r>
           </a:p>
           <a:p>
@@ -8711,7 +8727,7 @@
               <a:rPr dirty="0" spc="70" sz="3200">
                 <a:latin typeface="Tahoma"/>
               </a:rPr>
-              <a:t xml:space="preserve">RandomForest, 32 features, ROC-AUC 0.9308, 10/10 GSQL queries, 7/7 MCP tools live and 5 refused.</a:t>
+              <a:t xml:space="preserve">The fraud model scores 0.9308 ROC-AUC; 10 of 10 GSQL queries ran and 7 of 7 MCP tools answered.</a:t>
             </a:r>
           </a:p>
         </p:txBody>
@@ -9663,6 +9679,10 @@
           </p:nvPr>
         </p:nvSpPr>
         <p:spPr>
+          <a:xfrm>
+            <a:off x="886759" y="3003667"/>
+            <a:ext cx="8503920" cy="5120640"/>
+          </a:xfrm>
           <a:prstGeom prst="rect"/>
         </p:spPr>
         <p:txBody>
@@ -9683,7 +9703,7 @@
               <a:rPr dirty="0" spc="70" sz="3200">
                 <a:latin typeface="Tahoma"/>
               </a:rPr>
-              <a:t xml:space="preserve">14 architecture layers: 14 LIVE, 0 in progress, 0 architectural, each tagged by the artifact proving it.</a:t>
+              <a:t xml:space="preserve">14 layers, all live, each one tagged with the artifact that proves it.</a:t>
             </a:r>
           </a:p>
           <a:p>
@@ -9699,7 +9719,7 @@
               <a:rPr dirty="0" spc="70" sz="3200">
                 <a:latin typeface="Tahoma"/>
               </a:rPr>
-              <a:t xml:space="preserve">Nine-stage pipeline: trigger, triage, graph, evidence, ML, XAI, uncertainty, policy, next best action.</a:t>
+              <a:t xml:space="preserve">Nine stages from trigger to next best action, with a policy gate at the end.</a:t>
             </a:r>
           </a:p>
           <a:p>
@@ -9715,7 +9735,7 @@
               <a:rPr dirty="0" spc="70" sz="3200">
                 <a:latin typeface="Tahoma"/>
               </a:rPr>
-              <a:t xml:space="preserve">Every recommendation clears a policy gate before it reaches an analyst; graph writes stay blocked.</a:t>
+              <a:t xml:space="preserve">Nothing reaches an analyst before it clears that gate.</a:t>
             </a:r>
           </a:p>
         </p:txBody>
@@ -9773,6 +9793,30 @@
           </a:p>
         </p:txBody>
       </p:sp>
+      <p:pic>
+        <p:nvPicPr>
+          <p:cNvPr id="14" name="architecture diagram" descr="architecture.png"/>
+          <p:cNvPicPr>
+            <a:picLocks noChangeAspect="1"/>
+          </p:cNvPicPr>
+          <p:nvPr/>
+        </p:nvPicPr>
+        <p:blipFill>
+          <a:blip r:embed="rId5"/>
+          <a:stretch>
+            <a:fillRect/>
+          </a:stretch>
+        </p:blipFill>
+        <p:spPr>
+          <a:xfrm>
+            <a:off x="10058400" y="2999232"/>
+            <a:ext cx="6729984" cy="5577840"/>
+          </a:xfrm>
+          <a:prstGeom prst="rect">
+            <a:avLst/>
+          </a:prstGeom>
+        </p:spPr>
+      </p:pic>
     </p:spTree>
   </p:cSld>
   <p:clrMapOvr>
